--- a/output/3_1.pptx
+++ b/output/3_1.pptx
@@ -3174,8 +3174,8 @@
         </p:nvCxnSpPr>
         <p:spPr>
           <a:xfrm flipV="1">
-            <a:off x="4572000.0" y="2418588.0"/>
-            <a:ext cx="22860.0" cy="153162.0"/>
+            <a:off x="4572000.0" y="2365552.8"/>
+            <a:ext cx="23317.200000000186" cy="206197.2000000002"/>
           </a:xfrm>
           <a:prstGeom prst="line">
             <a:avLst/>
@@ -3209,8 +3209,8 @@
         </p:nvCxnSpPr>
         <p:spPr>
           <a:xfrm flipV="1">
-            <a:off x="4594860.0" y="2355037.2"/>
-            <a:ext cx="22860.0" cy="63550.799999999814"/>
+            <a:off x="4595317.2" y="2278227.6"/>
+            <a:ext cx="23774.39999999944" cy="87325.19999999972"/>
           </a:xfrm>
           <a:prstGeom prst="line">
             <a:avLst/>
@@ -3244,8 +3244,8 @@
         </p:nvCxnSpPr>
         <p:spPr>
           <a:xfrm flipV="1">
-            <a:off x="4617720.0" y="2306116.8"/>
-            <a:ext cx="22860.0" cy="48920.40000000037"/>
+            <a:off x="4619091.6" y="2212848.0"/>
+            <a:ext cx="23317.200000000186" cy="65379.60000000009"/>
           </a:xfrm>
           <a:prstGeom prst="line">
             <a:avLst/>
@@ -3279,8 +3279,8 @@
         </p:nvCxnSpPr>
         <p:spPr>
           <a:xfrm flipV="1">
-            <a:off x="4640580.0" y="2264968.8"/>
-            <a:ext cx="22860.0" cy="41148.0"/>
+            <a:off x="4642408.8" y="2160727.2"/>
+            <a:ext cx="23317.200000000186" cy="52120.799999999814"/>
           </a:xfrm>
           <a:prstGeom prst="line">
             <a:avLst/>
@@ -3314,8 +3314,8 @@
         </p:nvCxnSpPr>
         <p:spPr>
           <a:xfrm flipV="1">
-            <a:off x="4663440.0" y="2228850.0"/>
-            <a:ext cx="22860.0" cy="36118.799999999814"/>
+            <a:off x="4665726.0" y="2114550.0"/>
+            <a:ext cx="23317.200000000186" cy="46177.200000000186"/>
           </a:xfrm>
           <a:prstGeom prst="line">
             <a:avLst/>
@@ -3349,8 +3349,8 @@
         </p:nvCxnSpPr>
         <p:spPr>
           <a:xfrm flipV="1">
-            <a:off x="4686300.0" y="2195931.6"/>
-            <a:ext cx="22860.0" cy="32918.39999999991"/>
+            <a:off x="4689043.2" y="2067458.4"/>
+            <a:ext cx="23774.39999999944" cy="47091.60000000009"/>
           </a:xfrm>
           <a:prstGeom prst="line">
             <a:avLst/>
@@ -3384,8 +3384,8 @@
         </p:nvCxnSpPr>
         <p:spPr>
           <a:xfrm flipV="1">
-            <a:off x="4709160.0" y="2165299.2"/>
-            <a:ext cx="22860.0" cy="30632.399999999907"/>
+            <a:off x="4712817.6" y="2024024.4"/>
+            <a:ext cx="23317.200000000186" cy="43434.0"/>
           </a:xfrm>
           <a:prstGeom prst="line">
             <a:avLst/>
@@ -3419,8 +3419,8 @@
         </p:nvCxnSpPr>
         <p:spPr>
           <a:xfrm flipV="1">
-            <a:off x="4732020.0" y="2137867.2"/>
-            <a:ext cx="22860.0" cy="27432.0"/>
+            <a:off x="4736134.8" y="1984705.2"/>
+            <a:ext cx="23317.200000000186" cy="39319.19999999995"/>
           </a:xfrm>
           <a:prstGeom prst="line">
             <a:avLst/>
@@ -3454,8 +3454,8 @@
         </p:nvCxnSpPr>
         <p:spPr>
           <a:xfrm flipV="1">
-            <a:off x="4754880.0" y="2111806.8"/>
-            <a:ext cx="22860.0" cy="26060.400000000373"/>
+            <a:off x="4759452.0" y="1948586.4"/>
+            <a:ext cx="23774.400000000373" cy="36118.80000000005"/>
           </a:xfrm>
           <a:prstGeom prst="line">
             <a:avLst/>
@@ -3489,8 +3489,8 @@
         </p:nvCxnSpPr>
         <p:spPr>
           <a:xfrm flipV="1">
-            <a:off x="4777740.0" y="2086660.8"/>
-            <a:ext cx="22860.0" cy="25145.999999999767"/>
+            <a:off x="4783226.4" y="1914296.4"/>
+            <a:ext cx="23317.199999999255" cy="34290.0"/>
           </a:xfrm>
           <a:prstGeom prst="line">
             <a:avLst/>
@@ -3524,8 +3524,8 @@
         </p:nvCxnSpPr>
         <p:spPr>
           <a:xfrm flipV="1">
-            <a:off x="4800600.0" y="2062429.2"/>
-            <a:ext cx="22860.0" cy="24231.600000000093"/>
+            <a:off x="4806543.6" y="1881835.2000000002"/>
+            <a:ext cx="23317.200000000186" cy="32461.19999999972"/>
           </a:xfrm>
           <a:prstGeom prst="line">
             <a:avLst/>
@@ -3559,8 +3559,8 @@
         </p:nvCxnSpPr>
         <p:spPr>
           <a:xfrm flipV="1">
-            <a:off x="4823460.0" y="2040483.6"/>
-            <a:ext cx="22860.0" cy="21945.59999999986"/>
+            <a:off x="4829860.8" y="1850745.6"/>
+            <a:ext cx="23317.200000000186" cy="31089.600000000093"/>
           </a:xfrm>
           <a:prstGeom prst="line">
             <a:avLst/>
@@ -3594,8 +3594,8 @@
         </p:nvCxnSpPr>
         <p:spPr>
           <a:xfrm flipV="1">
-            <a:off x="4846320.0" y="2019909.6"/>
-            <a:ext cx="22860.0" cy="20574.0"/>
+            <a:off x="4853178.0" y="1820570.4"/>
+            <a:ext cx="23774.400000000373" cy="30175.200000000186"/>
           </a:xfrm>
           <a:prstGeom prst="line">
             <a:avLst/>
@@ -3629,8 +3629,8 @@
         </p:nvCxnSpPr>
         <p:spPr>
           <a:xfrm flipV="1">
-            <a:off x="4869180.0" y="2000250.0"/>
-            <a:ext cx="22860.0" cy="19659.600000000093"/>
+            <a:off x="4876952.4" y="1791766.8"/>
+            <a:ext cx="23317.199999999255" cy="28803.59999999986"/>
           </a:xfrm>
           <a:prstGeom prst="line">
             <a:avLst/>
@@ -3664,8 +3664,8 @@
         </p:nvCxnSpPr>
         <p:spPr>
           <a:xfrm flipV="1">
-            <a:off x="4892040.0" y="1977847.2000000002"/>
-            <a:ext cx="22860.0" cy="22402.799999999814"/>
+            <a:off x="4900269.6" y="1764792.0"/>
+            <a:ext cx="23317.200000000186" cy="26974.800000000047"/>
           </a:xfrm>
           <a:prstGeom prst="line">
             <a:avLst/>
@@ -3699,8 +3699,8 @@
         </p:nvCxnSpPr>
         <p:spPr>
           <a:xfrm flipV="1">
-            <a:off x="4914900.0" y="1958187.6"/>
-            <a:ext cx="22860.0" cy="19659.600000000093"/>
+            <a:off x="4923586.8" y="1738274.4"/>
+            <a:ext cx="23774.400000000373" cy="26517.600000000093"/>
           </a:xfrm>
           <a:prstGeom prst="line">
             <a:avLst/>
@@ -3734,8 +3734,8 @@
         </p:nvCxnSpPr>
         <p:spPr>
           <a:xfrm flipV="1">
-            <a:off x="4937760.0" y="1938528.0"/>
-            <a:ext cx="22860.0" cy="19659.600000000093"/>
+            <a:off x="4947361.2" y="1713128.4"/>
+            <a:ext cx="23317.200000000186" cy="25146.0"/>
           </a:xfrm>
           <a:prstGeom prst="line">
             <a:avLst/>
@@ -3769,8 +3769,8 @@
         </p:nvCxnSpPr>
         <p:spPr>
           <a:xfrm flipV="1">
-            <a:off x="4960620.0" y="1921154.4"/>
-            <a:ext cx="22860.0" cy="17373.600000000093"/>
+            <a:off x="4970678.4" y="1688439.6"/>
+            <a:ext cx="23317.199999999255" cy="24688.799999999814"/>
           </a:xfrm>
           <a:prstGeom prst="line">
             <a:avLst/>
@@ -3804,8 +3804,8 @@
         </p:nvCxnSpPr>
         <p:spPr>
           <a:xfrm flipV="1">
-            <a:off x="4983480.0" y="1903780.7999999998"/>
-            <a:ext cx="22860.0" cy="17373.600000000093"/>
+            <a:off x="4993995.6" y="1664665.2"/>
+            <a:ext cx="23317.200000000186" cy="23774.40000000014"/>
           </a:xfrm>
           <a:prstGeom prst="line">
             <a:avLst/>
@@ -3839,8 +3839,8 @@
         </p:nvCxnSpPr>
         <p:spPr>
           <a:xfrm flipV="1">
-            <a:off x="5006340.0" y="1889607.6"/>
-            <a:ext cx="18288.0" cy="14173.19999999972"/>
+            <a:off x="5017312.8" y="1645462.8"/>
+            <a:ext cx="23774.400000000373" cy="19202.399999999907"/>
           </a:xfrm>
           <a:prstGeom prst="line">
             <a:avLst/>
@@ -3866,15 +3866,330 @@
           </a:fontRef>
         </p:style>
       </p:cxnSp>
-      <p:sp>
-        <p:nvSpPr>
-          <p:cNvPr id="24" name="Oval 23"/>
+      <p:cxnSp>
+        <p:nvCxnSpPr>
+          <p:cNvPr id="24" name="Connector 23"/>
+          <p:cNvCxnSpPr/>
+          <p:nvPr/>
+        </p:nvCxnSpPr>
+        <p:spPr>
+          <a:xfrm flipV="1">
+            <a:off x="5041087.2" y="1623060.0"/>
+            <a:ext cx="23317.200000000186" cy="22402.800000000047"/>
+          </a:xfrm>
+          <a:prstGeom prst="line">
+            <a:avLst/>
+          </a:prstGeom>
+          <a:ln w="25400">
+            <a:solidFill>
+              <a:srgbClr val="00C8FF"/>
+            </a:solidFill>
+          </a:ln>
+        </p:spPr>
+        <p:style>
+          <a:lnRef idx="2">
+            <a:schemeClr val="accent1"/>
+          </a:lnRef>
+          <a:fillRef idx="0">
+            <a:schemeClr val="accent1"/>
+          </a:fillRef>
+          <a:effectRef idx="1">
+            <a:schemeClr val="accent1"/>
+          </a:effectRef>
+          <a:fontRef idx="minor">
+            <a:schemeClr val="tx1"/>
+          </a:fontRef>
+        </p:style>
+      </p:cxnSp>
+      <p:cxnSp>
+        <p:nvCxnSpPr>
+          <p:cNvPr id="25" name="Connector 24"/>
+          <p:cNvCxnSpPr/>
+          <p:nvPr/>
+        </p:nvCxnSpPr>
+        <p:spPr>
+          <a:xfrm flipV="1">
+            <a:off x="5064404.4" y="1600657.2"/>
+            <a:ext cx="23317.199999999255" cy="22402.800000000047"/>
+          </a:xfrm>
+          <a:prstGeom prst="line">
+            <a:avLst/>
+          </a:prstGeom>
+          <a:ln w="25400">
+            <a:solidFill>
+              <a:srgbClr val="00C8FF"/>
+            </a:solidFill>
+          </a:ln>
+        </p:spPr>
+        <p:style>
+          <a:lnRef idx="2">
+            <a:schemeClr val="accent1"/>
+          </a:lnRef>
+          <a:fillRef idx="0">
+            <a:schemeClr val="accent1"/>
+          </a:fillRef>
+          <a:effectRef idx="1">
+            <a:schemeClr val="accent1"/>
+          </a:effectRef>
+          <a:fontRef idx="minor">
+            <a:schemeClr val="tx1"/>
+          </a:fontRef>
+        </p:style>
+      </p:cxnSp>
+      <p:cxnSp>
+        <p:nvCxnSpPr>
+          <p:cNvPr id="26" name="Connector 25"/>
+          <p:cNvCxnSpPr/>
+          <p:nvPr/>
+        </p:nvCxnSpPr>
+        <p:spPr>
+          <a:xfrm flipV="1">
+            <a:off x="5087721.6" y="1578711.6"/>
+            <a:ext cx="23317.200000000186" cy="21945.59999999986"/>
+          </a:xfrm>
+          <a:prstGeom prst="line">
+            <a:avLst/>
+          </a:prstGeom>
+          <a:ln w="25400">
+            <a:solidFill>
+              <a:srgbClr val="00C8FF"/>
+            </a:solidFill>
+          </a:ln>
+        </p:spPr>
+        <p:style>
+          <a:lnRef idx="2">
+            <a:schemeClr val="accent1"/>
+          </a:lnRef>
+          <a:fillRef idx="0">
+            <a:schemeClr val="accent1"/>
+          </a:fillRef>
+          <a:effectRef idx="1">
+            <a:schemeClr val="accent1"/>
+          </a:effectRef>
+          <a:fontRef idx="minor">
+            <a:schemeClr val="tx1"/>
+          </a:fontRef>
+        </p:style>
+      </p:cxnSp>
+      <p:cxnSp>
+        <p:nvCxnSpPr>
+          <p:cNvPr id="27" name="Connector 26"/>
+          <p:cNvCxnSpPr/>
+          <p:nvPr/>
+        </p:nvCxnSpPr>
+        <p:spPr>
+          <a:xfrm flipV="1">
+            <a:off x="5111038.8" y="1557223.2000000002"/>
+            <a:ext cx="23774.400000000373" cy="21488.399999999907"/>
+          </a:xfrm>
+          <a:prstGeom prst="line">
+            <a:avLst/>
+          </a:prstGeom>
+          <a:ln w="25400">
+            <a:solidFill>
+              <a:srgbClr val="00C8FF"/>
+            </a:solidFill>
+          </a:ln>
+        </p:spPr>
+        <p:style>
+          <a:lnRef idx="2">
+            <a:schemeClr val="accent1"/>
+          </a:lnRef>
+          <a:fillRef idx="0">
+            <a:schemeClr val="accent1"/>
+          </a:fillRef>
+          <a:effectRef idx="1">
+            <a:schemeClr val="accent1"/>
+          </a:effectRef>
+          <a:fontRef idx="minor">
+            <a:schemeClr val="tx1"/>
+          </a:fontRef>
+        </p:style>
+      </p:cxnSp>
+      <p:cxnSp>
+        <p:nvCxnSpPr>
+          <p:cNvPr id="28" name="Connector 27"/>
+          <p:cNvCxnSpPr/>
+          <p:nvPr/>
+        </p:nvCxnSpPr>
+        <p:spPr>
+          <a:xfrm flipV="1">
+            <a:off x="5134813.2" y="1536649.2000000002"/>
+            <a:ext cx="23317.200000000186" cy="20574.0"/>
+          </a:xfrm>
+          <a:prstGeom prst="line">
+            <a:avLst/>
+          </a:prstGeom>
+          <a:ln w="25400">
+            <a:solidFill>
+              <a:srgbClr val="00C8FF"/>
+            </a:solidFill>
+          </a:ln>
+        </p:spPr>
+        <p:style>
+          <a:lnRef idx="2">
+            <a:schemeClr val="accent1"/>
+          </a:lnRef>
+          <a:fillRef idx="0">
+            <a:schemeClr val="accent1"/>
+          </a:fillRef>
+          <a:effectRef idx="1">
+            <a:schemeClr val="accent1"/>
+          </a:effectRef>
+          <a:fontRef idx="minor">
+            <a:schemeClr val="tx1"/>
+          </a:fontRef>
+        </p:style>
+      </p:cxnSp>
+      <p:cxnSp>
+        <p:nvCxnSpPr>
+          <p:cNvPr id="29" name="Connector 28"/>
+          <p:cNvCxnSpPr/>
+          <p:nvPr/>
+        </p:nvCxnSpPr>
+        <p:spPr>
+          <a:xfrm flipV="1">
+            <a:off x="5158130.4" y="1516075.2"/>
+            <a:ext cx="23317.199999999255" cy="20574.000000000233"/>
+          </a:xfrm>
+          <a:prstGeom prst="line">
+            <a:avLst/>
+          </a:prstGeom>
+          <a:ln w="25400">
+            <a:solidFill>
+              <a:srgbClr val="00C8FF"/>
+            </a:solidFill>
+          </a:ln>
+        </p:spPr>
+        <p:style>
+          <a:lnRef idx="2">
+            <a:schemeClr val="accent1"/>
+          </a:lnRef>
+          <a:fillRef idx="0">
+            <a:schemeClr val="accent1"/>
+          </a:fillRef>
+          <a:effectRef idx="1">
+            <a:schemeClr val="accent1"/>
+          </a:effectRef>
+          <a:fontRef idx="minor">
+            <a:schemeClr val="tx1"/>
+          </a:fontRef>
+        </p:style>
+      </p:cxnSp>
+      <p:cxnSp>
+        <p:nvCxnSpPr>
+          <p:cNvPr id="30" name="Connector 29"/>
+          <p:cNvCxnSpPr/>
+          <p:nvPr/>
+        </p:nvCxnSpPr>
+        <p:spPr>
+          <a:xfrm flipV="1">
+            <a:off x="5181447.6" y="1495958.4"/>
+            <a:ext cx="23774.400000000373" cy="20116.800000000047"/>
+          </a:xfrm>
+          <a:prstGeom prst="line">
+            <a:avLst/>
+          </a:prstGeom>
+          <a:ln w="25400">
+            <a:solidFill>
+              <a:srgbClr val="00C8FF"/>
+            </a:solidFill>
+          </a:ln>
+        </p:spPr>
+        <p:style>
+          <a:lnRef idx="2">
+            <a:schemeClr val="accent1"/>
+          </a:lnRef>
+          <a:fillRef idx="0">
+            <a:schemeClr val="accent1"/>
+          </a:fillRef>
+          <a:effectRef idx="1">
+            <a:schemeClr val="accent1"/>
+          </a:effectRef>
+          <a:fontRef idx="minor">
+            <a:schemeClr val="tx1"/>
+          </a:fontRef>
+        </p:style>
+      </p:cxnSp>
+      <p:cxnSp>
+        <p:nvCxnSpPr>
+          <p:cNvPr id="31" name="Connector 30"/>
+          <p:cNvCxnSpPr/>
+          <p:nvPr/>
+        </p:nvCxnSpPr>
+        <p:spPr>
+          <a:xfrm flipV="1">
+            <a:off x="5205222.0" y="1476298.8"/>
+            <a:ext cx="23317.200000000186" cy="19659.59999999986"/>
+          </a:xfrm>
+          <a:prstGeom prst="line">
+            <a:avLst/>
+          </a:prstGeom>
+          <a:ln w="25400">
+            <a:solidFill>
+              <a:srgbClr val="00C8FF"/>
+            </a:solidFill>
+          </a:ln>
+        </p:spPr>
+        <p:style>
+          <a:lnRef idx="2">
+            <a:schemeClr val="accent1"/>
+          </a:lnRef>
+          <a:fillRef idx="0">
+            <a:schemeClr val="accent1"/>
+          </a:fillRef>
+          <a:effectRef idx="1">
+            <a:schemeClr val="accent1"/>
+          </a:effectRef>
+          <a:fontRef idx="minor">
+            <a:schemeClr val="tx1"/>
+          </a:fontRef>
+        </p:style>
+      </p:cxnSp>
+      <p:cxnSp>
+        <p:nvCxnSpPr>
+          <p:cNvPr id="32" name="Connector 31"/>
+          <p:cNvCxnSpPr/>
+          <p:nvPr/>
+        </p:nvCxnSpPr>
+        <p:spPr>
+          <a:xfrm flipV="1">
+            <a:off x="5228539.2" y="1452067.2000000002"/>
+            <a:ext cx="29260.799999999814" cy="24231.59999999986"/>
+          </a:xfrm>
+          <a:prstGeom prst="line">
+            <a:avLst/>
+          </a:prstGeom>
+          <a:ln w="25400">
+            <a:solidFill>
+              <a:srgbClr val="00C8FF"/>
+            </a:solidFill>
+          </a:ln>
+        </p:spPr>
+        <p:style>
+          <a:lnRef idx="2">
+            <a:schemeClr val="accent1"/>
+          </a:lnRef>
+          <a:fillRef idx="0">
+            <a:schemeClr val="accent1"/>
+          </a:fillRef>
+          <a:effectRef idx="1">
+            <a:schemeClr val="accent1"/>
+          </a:effectRef>
+          <a:fontRef idx="minor">
+            <a:schemeClr val="tx1"/>
+          </a:fontRef>
+        </p:style>
+      </p:cxnSp>
+      <p:sp>
+        <p:nvSpPr>
+          <p:cNvPr id="33" name="Oval 32"/>
           <p:cNvSpPr/>
           <p:nvPr/>
         </p:nvSpPr>
         <p:spPr>
           <a:xfrm>
-            <a:off x="4991100" y="1847850"/>
+            <a:off x="4991100" y="1619250"/>
             <a:ext cx="76200" cy="76200"/>
           </a:xfrm>
           <a:prstGeom prst="ellipse">
@@ -3906,6 +4221,42 @@
           <a:lstStyle/>
           <a:p>
             <a:pPr algn="ctr"/>
+          </a:p>
+        </p:txBody>
+      </p:sp>
+      <p:sp>
+        <p:nvSpPr>
+          <p:cNvPr id="34" name="TextBox 33"/>
+          <p:cNvSpPr txBox="1"/>
+          <p:nvPr/>
+        </p:nvSpPr>
+        <p:spPr>
+          <a:xfrm>
+            <a:off x="5074920" y="1520190"/>
+            <a:ext cx="635000" cy="254000"/>
+          </a:xfrm>
+          <a:prstGeom prst="rect">
+            <a:avLst/>
+          </a:prstGeom>
+          <a:noFill/>
+        </p:spPr>
+        <p:txBody>
+          <a:bodyPr wrap="none">
+            <a:spAutoFit/>
+          </a:bodyPr>
+          <a:lstStyle/>
+          <a:p>
+            <a:pPr>
+              <a:defRPr sz="1200">
+                <a:solidFill>
+                  <a:srgbClr val="FFFFFF"/>
+                </a:solidFill>
+                <a:latin typeface="Inter"/>
+              </a:defRPr>
+            </a:pPr>
+            <a:r>
+              <a:t>y=f(x)</a:t>
+            </a:r>
           </a:p>
         </p:txBody>
       </p:sp>
